--- a/meteorage_battle_2026.pptx
+++ b/meteorage_battle_2026.pptx
@@ -8825,7 +8825,7 @@
         </p:nvSpPr>
         <p:spPr>
           <a:xfrm>
-            <a:off x="3749040" y="304848"/>
+            <a:off x="3755231" y="365134"/>
             <a:ext cx="1645920" cy="288036"/>
           </a:xfrm>
           <a:prstGeom prst="rect">
@@ -8967,7 +8967,7 @@
                   <a:srgbClr val="FFFFFF"/>
                 </a:solidFill>
               </a:rPr>
-              <a:t>Attente Δt = 1 min</a:t>
+              <a:t>Attente Δt = 30 s</a:t>
             </a:r>
             <a:endParaRPr lang="en-US" sz="563" dirty="0"/>
           </a:p>
@@ -9162,8 +9162,8 @@
         </p:nvSpPr>
         <p:spPr>
           <a:xfrm>
-            <a:off x="5737860" y="1300963"/>
-            <a:ext cx="548640" cy="6858"/>
+            <a:off x="5737859" y="1300962"/>
+            <a:ext cx="702183" cy="436421"/>
           </a:xfrm>
           <a:prstGeom prst="line">
             <a:avLst/>
@@ -9186,8 +9186,8 @@
         </p:nvSpPr>
         <p:spPr>
           <a:xfrm>
-            <a:off x="5737860" y="1198093"/>
-            <a:ext cx="548640" cy="102870"/>
+            <a:off x="5617083" y="1287014"/>
+            <a:ext cx="548640" cy="84607"/>
           </a:xfrm>
           <a:prstGeom prst="rect">
             <a:avLst/>
@@ -9220,8 +9220,8 @@
         </p:nvSpPr>
         <p:spPr>
           <a:xfrm>
-            <a:off x="6286500" y="1156945"/>
-            <a:ext cx="960120" cy="288036"/>
+            <a:off x="6403086" y="1734667"/>
+            <a:ext cx="960120" cy="426999"/>
           </a:xfrm>
           <a:prstGeom prst="rect">
             <a:avLst/>
@@ -9259,7 +9259,7 @@
         </p:nvSpPr>
         <p:spPr>
           <a:xfrm>
-            <a:off x="6286500" y="1163803"/>
+            <a:off x="6365748" y="1781571"/>
             <a:ext cx="960120" cy="149779"/>
           </a:xfrm>
           <a:prstGeom prst="rect">
@@ -9293,7 +9293,7 @@
         </p:nvSpPr>
         <p:spPr>
           <a:xfrm>
-            <a:off x="6286500" y="1300963"/>
+            <a:off x="6387846" y="1914689"/>
             <a:ext cx="960120" cy="144018"/>
           </a:xfrm>
           <a:prstGeom prst="rect">
@@ -9367,7 +9367,7 @@
         </p:nvSpPr>
         <p:spPr>
           <a:xfrm>
-            <a:off x="4578191" y="1052703"/>
+            <a:off x="4578191" y="707404"/>
             <a:ext cx="2194560" cy="6858"/>
           </a:xfrm>
           <a:prstGeom prst="line">
@@ -9579,7 +9579,7 @@
         <p:spPr>
           <a:xfrm>
             <a:off x="5737860" y="1712443"/>
-            <a:ext cx="706374" cy="399206"/>
+            <a:ext cx="649986" cy="255649"/>
           </a:xfrm>
           <a:prstGeom prst="line">
             <a:avLst/>
@@ -9596,79 +9596,6 @@
       </p:sp>
       <p:sp>
         <p:nvSpPr>
-          <p:cNvPr id="30" name="Text 28"/>
-          <p:cNvSpPr/>
-          <p:nvPr/>
-        </p:nvSpPr>
-        <p:spPr>
-          <a:xfrm>
-            <a:off x="6321362" y="2416047"/>
-            <a:ext cx="548640" cy="102870"/>
-          </a:xfrm>
-          <a:prstGeom prst="rect">
-            <a:avLst/>
-          </a:prstGeom>
-          <a:noFill/>
-          <a:ln/>
-        </p:spPr>
-        <p:txBody>
-          <a:bodyPr wrap="square" lIns="0" tIns="0" rIns="0" bIns="0" rtlCol="0" anchor="ctr"/>
-          <a:lstStyle/>
-          <a:p>
-            <a:pPr algn="ctr"/>
-            <a:r>
-              <a:rPr lang="en-US" sz="450" dirty="0">
-                <a:solidFill>
-                  <a:srgbClr val="64748B"/>
-                </a:solidFill>
-              </a:rPr>
-              <a:t>NON</a:t>
-            </a:r>
-            <a:endParaRPr lang="en-US" sz="450" dirty="0"/>
-          </a:p>
-        </p:txBody>
-      </p:sp>
-      <p:sp>
-        <p:nvSpPr>
-          <p:cNvPr id="31" name="Shape 29"/>
-          <p:cNvSpPr/>
-          <p:nvPr/>
-        </p:nvSpPr>
-        <p:spPr>
-          <a:xfrm>
-            <a:off x="6418612" y="2094248"/>
-            <a:ext cx="1229201" cy="286594"/>
-          </a:xfrm>
-          <a:prstGeom prst="rect">
-            <a:avLst/>
-          </a:prstGeom>
-          <a:solidFill>
-            <a:srgbClr val="64748B"/>
-          </a:solidFill>
-          <a:ln w="6350">
-            <a:solidFill>
-              <a:srgbClr val="64748B"/>
-            </a:solidFill>
-            <a:prstDash val="solid"/>
-          </a:ln>
-          <a:effectLst>
-            <a:outerShdw blurRad="38100" dist="12700" dir="8100000" algn="bl" rotWithShape="0">
-              <a:srgbClr val="000000">
-                <a:alpha val="10000"/>
-              </a:srgbClr>
-            </a:outerShdw>
-          </a:effectLst>
-        </p:spPr>
-        <p:txBody>
-          <a:bodyPr/>
-          <a:lstStyle/>
-          <a:p>
-            <a:endParaRPr lang="fr-CM" sz="1350" dirty="0"/>
-          </a:p>
-        </p:txBody>
-      </p:sp>
-      <p:sp>
-        <p:nvSpPr>
           <p:cNvPr id="32" name="Text 30"/>
           <p:cNvSpPr/>
           <p:nvPr/>
@@ -9736,37 +9663,6 @@
             <a:tailEnd type="none"/>
           </a:ln>
         </p:spPr>
-      </p:sp>
-      <p:sp>
-        <p:nvSpPr>
-          <p:cNvPr id="35" name="Shape 33"/>
-          <p:cNvSpPr/>
-          <p:nvPr/>
-        </p:nvSpPr>
-        <p:spPr>
-          <a:xfrm>
-            <a:off x="4572000" y="1396975"/>
-            <a:ext cx="2194560" cy="6858"/>
-          </a:xfrm>
-          <a:prstGeom prst="line">
-            <a:avLst/>
-          </a:prstGeom>
-          <a:noFill/>
-          <a:ln w="7620">
-            <a:solidFill>
-              <a:srgbClr val="64748B"/>
-            </a:solidFill>
-            <a:prstDash val="dash"/>
-            <a:tailEnd type="none"/>
-          </a:ln>
-        </p:spPr>
-        <p:txBody>
-          <a:bodyPr/>
-          <a:lstStyle/>
-          <a:p>
-            <a:endParaRPr lang="fr-CM" sz="1350" dirty="0"/>
-          </a:p>
-        </p:txBody>
       </p:sp>
       <p:sp>
         <p:nvSpPr>
@@ -10280,7 +10176,7 @@
         </p:nvSpPr>
         <p:spPr>
           <a:xfrm>
-            <a:off x="3406140" y="2535403"/>
+            <a:off x="3474720" y="2514829"/>
             <a:ext cx="2331720" cy="144018"/>
           </a:xfrm>
           <a:prstGeom prst="rect">
@@ -10314,7 +10210,7 @@
         </p:nvSpPr>
         <p:spPr>
           <a:xfrm>
-            <a:off x="4572000" y="2679421"/>
+            <a:off x="4590868" y="2695580"/>
             <a:ext cx="6858" cy="123444"/>
           </a:xfrm>
           <a:prstGeom prst="line">
@@ -10338,8 +10234,8 @@
         </p:nvSpPr>
         <p:spPr>
           <a:xfrm flipV="1">
-            <a:off x="5737860" y="2248173"/>
-            <a:ext cx="649986" cy="287230"/>
+            <a:off x="5737860" y="2168524"/>
+            <a:ext cx="677512" cy="366879"/>
           </a:xfrm>
           <a:prstGeom prst="line">
             <a:avLst/>
@@ -10567,8 +10463,8 @@
         </p:nvSpPr>
         <p:spPr>
           <a:xfrm>
-            <a:off x="3406140" y="3214345"/>
-            <a:ext cx="2331720" cy="288036"/>
+            <a:off x="3406140" y="3271520"/>
+            <a:ext cx="2331720" cy="294944"/>
           </a:xfrm>
           <a:prstGeom prst="rect">
             <a:avLst/>
@@ -11112,38 +11008,6 @@
       </p:sp>
       <p:sp>
         <p:nvSpPr>
-          <p:cNvPr id="84" name="Shape 82"/>
-          <p:cNvSpPr/>
-          <p:nvPr/>
-        </p:nvSpPr>
-        <p:spPr>
-          <a:xfrm>
-            <a:off x="3422904" y="4074373"/>
-            <a:ext cx="2331720" cy="259232"/>
-          </a:xfrm>
-          <a:prstGeom prst="rect">
-            <a:avLst/>
-          </a:prstGeom>
-          <a:solidFill>
-            <a:srgbClr val="64748B"/>
-          </a:solidFill>
-          <a:ln w="12700">
-            <a:solidFill>
-              <a:srgbClr val="FFFFFF"/>
-            </a:solidFill>
-            <a:prstDash val="solid"/>
-          </a:ln>
-          <a:effectLst>
-            <a:outerShdw blurRad="38100" dist="12700" dir="8100000" algn="bl" rotWithShape="0">
-              <a:srgbClr val="000000">
-                <a:alpha val="10000"/>
-              </a:srgbClr>
-            </a:outerShdw>
-          </a:effectLst>
-        </p:spPr>
-      </p:sp>
-      <p:sp>
-        <p:nvSpPr>
           <p:cNvPr id="85" name="Text 83"/>
           <p:cNvSpPr/>
           <p:nvPr/>
@@ -11303,7 +11167,7 @@
                   <a:srgbClr val="FFFFFF"/>
                 </a:solidFill>
               </a:rPr>
-              <a:t>+10 min</a:t>
+              <a:t>+? min</a:t>
             </a:r>
             <a:endParaRPr lang="en-US" sz="488" dirty="0"/>
           </a:p>
@@ -11317,7 +11181,7 @@
         </p:nvSpPr>
         <p:spPr>
           <a:xfrm>
-            <a:off x="3739515" y="4544762"/>
+            <a:off x="3783330" y="4095291"/>
             <a:ext cx="1645920" cy="244831"/>
           </a:xfrm>
           <a:prstGeom prst="rect">
@@ -11349,7 +11213,7 @@
         </p:nvSpPr>
         <p:spPr>
           <a:xfrm>
-            <a:off x="3717798" y="4549557"/>
+            <a:off x="3731514" y="4114559"/>
             <a:ext cx="1645920" cy="244831"/>
           </a:xfrm>
           <a:prstGeom prst="rect">
@@ -11818,145 +11682,6 @@
               <a:srgbClr val="64748B"/>
             </a:solidFill>
             <a:prstDash val="dash"/>
-            <a:tailEnd type="arrow"/>
-          </a:ln>
-        </p:spPr>
-      </p:sp>
-      <p:sp>
-        <p:nvSpPr>
-          <p:cNvPr id="119" name="Text 94">
-            <a:extLst>
-              <a:ext uri="{FF2B5EF4-FFF2-40B4-BE49-F238E27FC236}">
-                <a16:creationId xmlns:a16="http://schemas.microsoft.com/office/drawing/2014/main" id="{772D994C-C565-4283-8946-282E84F9870D}"/>
-              </a:ext>
-            </a:extLst>
-          </p:cNvPr>
-          <p:cNvSpPr/>
-          <p:nvPr/>
-        </p:nvSpPr>
-        <p:spPr>
-          <a:xfrm>
-            <a:off x="4606290" y="4379397"/>
-            <a:ext cx="274320" cy="159075"/>
-          </a:xfrm>
-          <a:prstGeom prst="rect">
-            <a:avLst/>
-          </a:prstGeom>
-          <a:noFill/>
-          <a:ln/>
-        </p:spPr>
-        <p:txBody>
-          <a:bodyPr wrap="square" lIns="0" tIns="0" rIns="0" bIns="0" rtlCol="0" anchor="ctr"/>
-          <a:lstStyle/>
-          <a:p>
-            <a:r>
-              <a:rPr lang="en-US" sz="450" dirty="0">
-                <a:solidFill>
-                  <a:srgbClr val="64748B"/>
-                </a:solidFill>
-              </a:rPr>
-              <a:t>NON</a:t>
-            </a:r>
-            <a:endParaRPr lang="en-US" sz="450" dirty="0"/>
-          </a:p>
-        </p:txBody>
-      </p:sp>
-      <p:sp>
-        <p:nvSpPr>
-          <p:cNvPr id="120" name="Shape 85">
-            <a:extLst>
-              <a:ext uri="{FF2B5EF4-FFF2-40B4-BE49-F238E27FC236}">
-                <a16:creationId xmlns:a16="http://schemas.microsoft.com/office/drawing/2014/main" id="{3813F7D5-32D1-40A0-AD80-A629505167CD}"/>
-              </a:ext>
-            </a:extLst>
-          </p:cNvPr>
-          <p:cNvSpPr/>
-          <p:nvPr/>
-        </p:nvSpPr>
-        <p:spPr>
-          <a:xfrm>
-            <a:off x="4537711" y="4397637"/>
-            <a:ext cx="6858" cy="109728"/>
-          </a:xfrm>
-          <a:prstGeom prst="line">
-            <a:avLst/>
-          </a:prstGeom>
-          <a:noFill/>
-          <a:ln w="10160">
-            <a:solidFill>
-              <a:srgbClr val="64748B"/>
-            </a:solidFill>
-            <a:prstDash val="solid"/>
-            <a:tailEnd type="arrow"/>
-          </a:ln>
-        </p:spPr>
-      </p:sp>
-      <p:sp>
-        <p:nvSpPr>
-          <p:cNvPr id="121" name="Text 87">
-            <a:extLst>
-              <a:ext uri="{FF2B5EF4-FFF2-40B4-BE49-F238E27FC236}">
-                <a16:creationId xmlns:a16="http://schemas.microsoft.com/office/drawing/2014/main" id="{BDA90538-A5AC-4CFC-AA1A-E71089395EAF}"/>
-              </a:ext>
-            </a:extLst>
-          </p:cNvPr>
-          <p:cNvSpPr/>
-          <p:nvPr/>
-        </p:nvSpPr>
-        <p:spPr>
-          <a:xfrm>
-            <a:off x="5740146" y="4159466"/>
-            <a:ext cx="548640" cy="102870"/>
-          </a:xfrm>
-          <a:prstGeom prst="rect">
-            <a:avLst/>
-          </a:prstGeom>
-          <a:noFill/>
-          <a:ln/>
-        </p:spPr>
-        <p:txBody>
-          <a:bodyPr wrap="square" lIns="0" tIns="0" rIns="0" bIns="0" rtlCol="0" anchor="ctr"/>
-          <a:lstStyle/>
-          <a:p>
-            <a:pPr algn="ctr"/>
-            <a:r>
-              <a:rPr lang="en-US" sz="450" dirty="0">
-                <a:solidFill>
-                  <a:srgbClr val="64748B"/>
-                </a:solidFill>
-              </a:rPr>
-              <a:t>OUI</a:t>
-            </a:r>
-            <a:endParaRPr lang="en-US" sz="450" dirty="0"/>
-          </a:p>
-        </p:txBody>
-      </p:sp>
-      <p:sp>
-        <p:nvSpPr>
-          <p:cNvPr id="122" name="Shape 86">
-            <a:extLst>
-              <a:ext uri="{FF2B5EF4-FFF2-40B4-BE49-F238E27FC236}">
-                <a16:creationId xmlns:a16="http://schemas.microsoft.com/office/drawing/2014/main" id="{838CF1F8-73DA-4A4C-BCA4-CFC948C20C28}"/>
-              </a:ext>
-            </a:extLst>
-          </p:cNvPr>
-          <p:cNvSpPr/>
-          <p:nvPr/>
-        </p:nvSpPr>
-        <p:spPr>
-          <a:xfrm>
-            <a:off x="5799582" y="4262336"/>
-            <a:ext cx="548640" cy="6858"/>
-          </a:xfrm>
-          <a:prstGeom prst="line">
-            <a:avLst/>
-          </a:prstGeom>
-          <a:noFill/>
-          <a:ln w="10160">
-            <a:solidFill>
-              <a:srgbClr val="64748B"/>
-            </a:solidFill>
-            <a:prstDash val="solid"/>
             <a:tailEnd type="arrow"/>
           </a:ln>
         </p:spPr>
@@ -12233,106 +11958,6 @@
       </p:sp>
       <p:sp>
         <p:nvSpPr>
-          <p:cNvPr id="131" name="Shape 52">
-            <a:extLst>
-              <a:ext uri="{FF2B5EF4-FFF2-40B4-BE49-F238E27FC236}">
-                <a16:creationId xmlns:a16="http://schemas.microsoft.com/office/drawing/2014/main" id="{D6754B5B-C75A-434E-AB83-B8C0FE888981}"/>
-              </a:ext>
-            </a:extLst>
-          </p:cNvPr>
-          <p:cNvSpPr/>
-          <p:nvPr/>
-        </p:nvSpPr>
-        <p:spPr>
-          <a:xfrm flipH="1">
-            <a:off x="5796058" y="2323359"/>
-            <a:ext cx="887444" cy="648938"/>
-          </a:xfrm>
-          <a:prstGeom prst="line">
-            <a:avLst/>
-          </a:prstGeom>
-          <a:noFill/>
-          <a:ln w="10160">
-            <a:solidFill>
-              <a:srgbClr val="64748B"/>
-            </a:solidFill>
-            <a:prstDash val="solid"/>
-            <a:tailEnd type="arrow"/>
-          </a:ln>
-        </p:spPr>
-      </p:sp>
-      <p:sp>
-        <p:nvSpPr>
-          <p:cNvPr id="132" name="Text 68">
-            <a:extLst>
-              <a:ext uri="{FF2B5EF4-FFF2-40B4-BE49-F238E27FC236}">
-                <a16:creationId xmlns:a16="http://schemas.microsoft.com/office/drawing/2014/main" id="{DA423E7B-0ADD-4CD6-9AFD-AB5F47199F9A}"/>
-              </a:ext>
-            </a:extLst>
-          </p:cNvPr>
-          <p:cNvSpPr/>
-          <p:nvPr/>
-        </p:nvSpPr>
-        <p:spPr>
-          <a:xfrm>
-            <a:off x="6560820" y="1578711"/>
-            <a:ext cx="548640" cy="102870"/>
-          </a:xfrm>
-          <a:prstGeom prst="rect">
-            <a:avLst/>
-          </a:prstGeom>
-          <a:noFill/>
-          <a:ln/>
-        </p:spPr>
-        <p:txBody>
-          <a:bodyPr wrap="square" lIns="0" tIns="0" rIns="0" bIns="0" rtlCol="0" anchor="ctr"/>
-          <a:lstStyle/>
-          <a:p>
-            <a:pPr algn="ctr"/>
-            <a:r>
-              <a:rPr lang="en-US" sz="450" dirty="0">
-                <a:solidFill>
-                  <a:srgbClr val="64748B"/>
-                </a:solidFill>
-              </a:rPr>
-              <a:t>OUI</a:t>
-            </a:r>
-            <a:endParaRPr lang="en-US" sz="450" dirty="0"/>
-          </a:p>
-        </p:txBody>
-      </p:sp>
-      <p:sp>
-        <p:nvSpPr>
-          <p:cNvPr id="133" name="Shape 27">
-            <a:extLst>
-              <a:ext uri="{FF2B5EF4-FFF2-40B4-BE49-F238E27FC236}">
-                <a16:creationId xmlns:a16="http://schemas.microsoft.com/office/drawing/2014/main" id="{54591A14-9E7D-4647-941F-A5563FF34269}"/>
-              </a:ext>
-            </a:extLst>
-          </p:cNvPr>
-          <p:cNvSpPr/>
-          <p:nvPr/>
-        </p:nvSpPr>
-        <p:spPr>
-          <a:xfrm flipH="1" flipV="1">
-            <a:off x="6766560" y="1437253"/>
-            <a:ext cx="16383" cy="685455"/>
-          </a:xfrm>
-          <a:prstGeom prst="line">
-            <a:avLst/>
-          </a:prstGeom>
-          <a:noFill/>
-          <a:ln w="10160">
-            <a:solidFill>
-              <a:srgbClr val="64748B"/>
-            </a:solidFill>
-            <a:prstDash val="solid"/>
-            <a:tailEnd type="arrow"/>
-          </a:ln>
-        </p:spPr>
-      </p:sp>
-      <p:sp>
-        <p:nvSpPr>
           <p:cNvPr id="134" name="Text 28">
             <a:extLst>
               <a:ext uri="{FF2B5EF4-FFF2-40B4-BE49-F238E27FC236}">
@@ -12370,6 +11995,106 @@
             <a:endParaRPr lang="en-US" sz="450" dirty="0"/>
           </a:p>
         </p:txBody>
+      </p:sp>
+      <p:sp>
+        <p:nvSpPr>
+          <p:cNvPr id="118" name="Text 68">
+            <a:extLst>
+              <a:ext uri="{FF2B5EF4-FFF2-40B4-BE49-F238E27FC236}">
+                <a16:creationId xmlns:a16="http://schemas.microsoft.com/office/drawing/2014/main" id="{79832E4C-CC28-4774-A5C9-BFF49E61FE94}"/>
+              </a:ext>
+            </a:extLst>
+          </p:cNvPr>
+          <p:cNvSpPr/>
+          <p:nvPr/>
+        </p:nvSpPr>
+        <p:spPr>
+          <a:xfrm>
+            <a:off x="4434840" y="2712489"/>
+            <a:ext cx="548640" cy="102870"/>
+          </a:xfrm>
+          <a:prstGeom prst="rect">
+            <a:avLst/>
+          </a:prstGeom>
+          <a:noFill/>
+          <a:ln/>
+        </p:spPr>
+        <p:txBody>
+          <a:bodyPr wrap="square" lIns="0" tIns="0" rIns="0" bIns="0" rtlCol="0" anchor="ctr"/>
+          <a:lstStyle/>
+          <a:p>
+            <a:pPr algn="ctr"/>
+            <a:r>
+              <a:rPr lang="en-US" sz="450" dirty="0">
+                <a:solidFill>
+                  <a:srgbClr val="64748B"/>
+                </a:solidFill>
+              </a:rPr>
+              <a:t>OUI</a:t>
+            </a:r>
+            <a:endParaRPr lang="en-US" sz="450" dirty="0"/>
+          </a:p>
+        </p:txBody>
+      </p:sp>
+      <p:sp>
+        <p:nvSpPr>
+          <p:cNvPr id="130" name="Shape 80">
+            <a:extLst>
+              <a:ext uri="{FF2B5EF4-FFF2-40B4-BE49-F238E27FC236}">
+                <a16:creationId xmlns:a16="http://schemas.microsoft.com/office/drawing/2014/main" id="{B9670906-7163-4575-908F-C35D3BE5A191}"/>
+              </a:ext>
+            </a:extLst>
+          </p:cNvPr>
+          <p:cNvSpPr/>
+          <p:nvPr/>
+        </p:nvSpPr>
+        <p:spPr>
+          <a:xfrm flipH="1" flipV="1">
+            <a:off x="6910569" y="2168524"/>
+            <a:ext cx="6857" cy="557290"/>
+          </a:xfrm>
+          <a:prstGeom prst="line">
+            <a:avLst/>
+          </a:prstGeom>
+          <a:noFill/>
+          <a:ln w="7620">
+            <a:solidFill>
+              <a:srgbClr val="64748B"/>
+            </a:solidFill>
+            <a:prstDash val="dash"/>
+            <a:tailEnd type="arrow"/>
+          </a:ln>
+        </p:spPr>
+      </p:sp>
+      <p:sp>
+        <p:nvSpPr>
+          <p:cNvPr id="135" name="Shape 80">
+            <a:extLst>
+              <a:ext uri="{FF2B5EF4-FFF2-40B4-BE49-F238E27FC236}">
+                <a16:creationId xmlns:a16="http://schemas.microsoft.com/office/drawing/2014/main" id="{103E3C7B-0E94-476B-AEBB-8BCF7F452991}"/>
+              </a:ext>
+            </a:extLst>
+          </p:cNvPr>
+          <p:cNvSpPr/>
+          <p:nvPr/>
+        </p:nvSpPr>
+        <p:spPr>
+          <a:xfrm flipH="1" flipV="1">
+            <a:off x="6775449" y="694375"/>
+            <a:ext cx="25401" cy="1094506"/>
+          </a:xfrm>
+          <a:prstGeom prst="line">
+            <a:avLst/>
+          </a:prstGeom>
+          <a:noFill/>
+          <a:ln w="7620">
+            <a:solidFill>
+              <a:srgbClr val="64748B"/>
+            </a:solidFill>
+            <a:prstDash val="dash"/>
+            <a:tailEnd type="arrow"/>
+          </a:ln>
+        </p:spPr>
       </p:sp>
     </p:spTree>
   </p:cSld>
